--- a/lecons/LSA/Biogeography/01_LSA_BIO_L01_The_Soil.pptx
+++ b/lecons/LSA/Biogeography/01_LSA_BIO_L01_The_Soil.pptx
@@ -3463,7 +3463,7 @@
           <a:p>
             <a:r>
               <a:rPr lang="en-US" dirty="0"/>
-              <a:t>Before we start the new lesson, let us correct the homework I gave you at the end of Further Study 3: Relief of Cameroon. The question was: Revise the Geomorphology lessons. Draw and label a sketch map of the relief of Cameroon. Take out your exercise books.</a:t>
+              <a:t>Before we start the new lesson, let us correct the homework I gave you at the end of Further Study 3: Relief of Cameroon. The question was: Define soil. Take out your exercise books.</a:t>
             </a:r>
             <a:endParaRPr lang="en-US" dirty="0"/>
           </a:p>
@@ -4431,7 +4431,7 @@
           <a:p>
             <a:r>
               <a:rPr lang="en-US" dirty="0"/>
-              <a:t>Here is a good answer. The sketch map shows the coastal lowlands, Mount Cameroon, the Western Highlands, the South Cameroon Plateau, the Adamawa Plateau, the Benue depression, the Mandara Mountains and the Chad plain, with a key, title and north arrow. Compare it with your own answer and correct your work in red.</a:t>
+              <a:t>Here is a good answer. Soil is the thin upper layer of the land made of weathered rock, humus, water and air, in which plants grow. Compare it with your own answer and correct your work in red.</a:t>
             </a:r>
             <a:endParaRPr lang="en-US" dirty="0"/>
           </a:p>
@@ -15373,7 +15373,7 @@
                 <a:ea typeface="Times New Roman" pitchFamily="34" charset="-122"/>
                 <a:cs typeface="Times New Roman" pitchFamily="34" charset="-120"/>
               </a:rPr>
-              <a:t>Revise the Geomorphology lessons. Draw and label a sketch map of the relief of Cameroon.</a:t>
+              <a:t>Define soil.</a:t>
             </a:r>
             <a:endParaRPr lang="en-US" sz="4000" dirty="0"/>
           </a:p>
@@ -17813,7 +17813,7 @@
         <p:spPr>
           <a:xfrm>
             <a:off x="0" y="658368"/>
-            <a:ext cx="2468880" cy="5833872"/>
+            <a:ext cx="5120640" cy="5833872"/>
           </a:xfrm>
           <a:prstGeom prst="rect">
             <a:avLst/>
@@ -17828,8 +17828,8 @@
         </p:nvSpPr>
         <p:spPr>
           <a:xfrm>
-            <a:off x="2697480" y="1005840"/>
-            <a:ext cx="9174175" cy="731520"/>
+            <a:off x="5349240" y="1005840"/>
+            <a:ext cx="6522415" cy="731520"/>
           </a:xfrm>
           <a:prstGeom prst="rect">
             <a:avLst/>
@@ -17869,8 +17869,8 @@
         </p:nvSpPr>
         <p:spPr>
           <a:xfrm>
-            <a:off x="2697480" y="1783080"/>
-            <a:ext cx="9174175" cy="4663440"/>
+            <a:off x="5349240" y="1783080"/>
+            <a:ext cx="6522415" cy="4663440"/>
           </a:xfrm>
           <a:prstGeom prst="rect">
             <a:avLst/>
@@ -17897,7 +17897,7 @@
                 <a:ea typeface="Times New Roman" pitchFamily="34" charset="-122"/>
                 <a:cs typeface="Times New Roman" pitchFamily="34" charset="-120"/>
               </a:rPr>
-              <a:t>The sketch map shows the coastal lowlands, Mount Cameroon, the Western Highlands, the South Cameroon Plateau, the Adamawa Plateau, the Benue depression, the Mandara Mountains and the Chad plain, with a key, title and north arrow.</a:t>
+              <a:t>Soil is the thin upper layer of the land made of weathered rock, humus, water and air, in which plants grow.</a:t>
             </a:r>
             <a:endParaRPr lang="en-US" sz="4000" dirty="0"/>
           </a:p>

--- a/lecons/LSA/Biogeography/01_LSA_BIO_L01_The_Soil.pptx
+++ b/lecons/LSA/Biogeography/01_LSA_BIO_L01_The_Soil.pptx
@@ -3463,7 +3463,7 @@
           <a:p>
             <a:r>
               <a:rPr lang="en-US" dirty="0"/>
-              <a:t>Before we start the new lesson, let us correct the homework I gave you at the end of Further Study 3: Relief of Cameroon. The question was: Define soil. Take out your exercise books.</a:t>
+              <a:t>Before we start the new lesson, let us correct the homework I gave you at the end of Lesson 16: Coastal Processes and Features. The question was: Name the four components of soil. Take out your exercise books.</a:t>
             </a:r>
             <a:endParaRPr lang="en-US" dirty="0"/>
           </a:p>
@@ -4431,7 +4431,7 @@
           <a:p>
             <a:r>
               <a:rPr lang="en-US" dirty="0"/>
-              <a:t>Here is a good answer. Soil is the thin upper layer of the land made of weathered rock, humus, water and air, in which plants grow. Compare it with your own answer and correct your work in red.</a:t>
+              <a:t>Here is a good answer. Mineral matter, organic matter (humus), water and air. Compare it with your own answer and correct your work in red.</a:t>
             </a:r>
             <a:endParaRPr lang="en-US" dirty="0"/>
           </a:p>
@@ -15353,7 +15353,7 @@
                 <a:ea typeface="Times New Roman" pitchFamily="34" charset="-122"/>
                 <a:cs typeface="Times New Roman" pitchFamily="34" charset="-120"/>
               </a:rPr>
-              <a:t>Question (Further Study 3: Relief of Cameroon):</a:t>
+              <a:t>Question (Lesson 16: Coastal Processes and Features):</a:t>
             </a:r>
             <a:endParaRPr lang="en-US" sz="4000" dirty="0"/>
           </a:p>
@@ -15373,7 +15373,7 @@
                 <a:ea typeface="Times New Roman" pitchFamily="34" charset="-122"/>
                 <a:cs typeface="Times New Roman" pitchFamily="34" charset="-120"/>
               </a:rPr>
-              <a:t>Define soil.</a:t>
+              <a:t>Name the four components of soil.</a:t>
             </a:r>
             <a:endParaRPr lang="en-US" sz="4000" dirty="0"/>
           </a:p>
@@ -17897,7 +17897,7 @@
                 <a:ea typeface="Times New Roman" pitchFamily="34" charset="-122"/>
                 <a:cs typeface="Times New Roman" pitchFamily="34" charset="-120"/>
               </a:rPr>
-              <a:t>Soil is the thin upper layer of the land made of weathered rock, humus, water and air, in which plants grow.</a:t>
+              <a:t>Mineral matter, organic matter (humus), water and air.</a:t>
             </a:r>
             <a:endParaRPr lang="en-US" sz="4000" dirty="0"/>
           </a:p>
